--- a/第7回_Softmax_Generation/excel_softmax_generation_slides.pptx
+++ b/第7回_Softmax_Generation/excel_softmax_generation_slides.pptx
@@ -3121,7 +3121,7 @@
         <p:spPr>
           <a:xfrm>
             <a:off x="640080" y="868680"/>
-            <a:ext cx="7040880" cy="566928"/>
+            <a:ext cx="6949440" cy="594360"/>
           </a:xfrm>
           <a:prstGeom prst="rect">
             <a:avLst/>
@@ -3134,6 +3134,7 @@
           </a:bodyPr>
           <a:lstStyle/>
           <a:p>
+            <a:pPr algn="l"/>
             <a:r>
               <a:rPr sz="2500" b="1">
                 <a:solidFill>
@@ -3141,7 +3142,7 @@
                 </a:solidFill>
                 <a:latin typeface="Yu Gothic"/>
               </a:rPr>
-              <a:t>Excelで体験する言語モデルのしくみ</a:t>
+              <a:t>Excelで体験する 言語モデルのしくみ</a:t>
             </a:r>
           </a:p>
         </p:txBody>
@@ -3189,7 +3190,7 @@
         <p:spPr>
           <a:xfrm>
             <a:off x="685800" y="2148840"/>
-            <a:ext cx="5943600" cy="731520"/>
+            <a:ext cx="5806440" cy="731520"/>
           </a:xfrm>
           <a:prstGeom prst="rect">
             <a:avLst/>
